--- a/curso_es/pptx/S68.pptx
+++ b/curso_es/pptx/S68.pptx
@@ -4213,7 +4213,7 @@
                 </a:solidFill>
                 <a:latin typeface="Nunito Sans"/>
               </a:rPr>
-              <a:t>Kevin come tres hamburguesas de vaca a la semana. Leire, tres platos de lentejas. ¿Qué comida tiene más huella? (Ejemplo inventado.)</a:t>
+              <a:t>Un chico come tres hamburguesas de vaca a la semana. Una chica, tres platos de lentejas. ¿Qué comida tiene más huella? (Ejemplo inventado.)</a:t>
             </a:r>
           </a:p>
         </p:txBody>
@@ -4372,7 +4372,7 @@
                 </a:solidFill>
                 <a:latin typeface="Nunito Sans"/>
               </a:rPr>
-              <a:t> comemos. Es un dato, no un juicio sobre Kevin.</a:t>
+              <a:t> comemos. Es un dato, no un juicio sobre ese chico.</a:t>
             </a:r>
           </a:p>
         </p:txBody>
@@ -4885,7 +4885,7 @@
                 </a:solidFill>
                 <a:latin typeface="Nunito Sans"/>
               </a:rPr>
-              <a:t>En invierno, Iker elige tomates de un invernadero con calefacción cerca de casa, no de Almería. «Lo local siempre contamina menos», dice. (Ejemplo inventado.)</a:t>
+              <a:t>En invierno, un chico elige tomates de un invernadero con calefacción cerca de casa, no de Almería. «Lo local siempre contamina menos», dice. (Ejemplo inventado.)</a:t>
             </a:r>
           </a:p>
         </p:txBody>
